--- a/VillariWilliam1000045058 test2.pptx
+++ b/VillariWilliam1000045058 test2.pptx
@@ -793,6 +793,13 @@
           </p:nvPr>
         </p:nvSpPr>
         <p:spPr/>
+        <p:txBody>
+          <a:bodyPr/>
+          <a:lstStyle/>
+          <a:p>
+            <a:endParaRPr lang="it-IT"/>
+          </a:p>
+        </p:txBody>
       </p:sp>
       <p:sp>
         <p:nvSpPr>
@@ -1009,6 +1016,13 @@
           </p:nvPr>
         </p:nvSpPr>
         <p:spPr/>
+        <p:txBody>
+          <a:bodyPr/>
+          <a:lstStyle/>
+          <a:p>
+            <a:endParaRPr lang="it-IT"/>
+          </a:p>
+        </p:txBody>
       </p:sp>
       <p:sp>
         <p:nvSpPr>
@@ -1147,6 +1161,13 @@
           </p:nvPr>
         </p:nvSpPr>
         <p:spPr/>
+        <p:txBody>
+          <a:bodyPr/>
+          <a:lstStyle/>
+          <a:p>
+            <a:endParaRPr lang="it-IT"/>
+          </a:p>
+        </p:txBody>
       </p:sp>
       <p:sp>
         <p:nvSpPr>
@@ -10354,15 +10375,7 @@
             </a:r>
             <a:r>
               <a:rPr lang="it-IT" sz="2200" i="1" dirty="0"/>
-              <a:t>Real Life </a:t>
-            </a:r>
-            <a:r>
-              <a:rPr lang="it-IT" sz="2200" i="1" dirty="0" err="1"/>
-              <a:t>Violence</a:t>
-            </a:r>
-            <a:r>
-              <a:rPr lang="it-IT" sz="2200" i="1" dirty="0"/>
-              <a:t> Situations </a:t>
+              <a:t>Real Life Violence Situations </a:t>
             </a:r>
             <a:r>
               <a:rPr lang="it-IT" sz="2200" dirty="0"/>
@@ -11919,6 +11932,12 @@
 </file>
 
 <file path=customXml/item2.xml><?xml version="1.0" encoding="utf-8"?>
+<p:properties xmlns:p="http://schemas.microsoft.com/office/2006/metadata/properties" xmlns:xsi="http://www.w3.org/2001/XMLSchema-instance" xmlns:pc="http://schemas.microsoft.com/office/infopath/2007/PartnerControls">
+  <documentManagement/>
+</p:properties>
+</file>
+
+<file path=customXml/item3.xml><?xml version="1.0" encoding="utf-8"?>
 <ct:contentTypeSchema xmlns:ct="http://schemas.microsoft.com/office/2006/metadata/contentType" xmlns:ma="http://schemas.microsoft.com/office/2006/metadata/properties/metaAttributes" ct:_="" ma:_="" ma:contentTypeName="Document" ma:contentTypeID="0x0101003E9CE079615D884A940FCB6663749814" ma:contentTypeVersion="12" ma:contentTypeDescription="Create a new document." ma:contentTypeScope="" ma:versionID="730a3498471033da2349798728f12144">
   <xsd:schema xmlns:xsd="http://www.w3.org/2001/XMLSchema" xmlns:xs="http://www.w3.org/2001/XMLSchema" xmlns:p="http://schemas.microsoft.com/office/2006/metadata/properties" xmlns:ns3="c224ffea-49cd-4700-9eee-e6fd160cd816" xmlns:ns4="d543374b-509c-4350-a5c8-3c1bd8055ec5" targetNamespace="http://schemas.microsoft.com/office/2006/metadata/properties" ma:root="true" ma:fieldsID="8e3cb5a327f01176a942c93285e0e7f8" ns3:_="" ns4:_="">
     <xsd:import namespace="c224ffea-49cd-4700-9eee-e6fd160cd816"/>
@@ -12135,12 +12154,6 @@
 </ct:contentTypeSchema>
 </file>
 
-<file path=customXml/item3.xml><?xml version="1.0" encoding="utf-8"?>
-<p:properties xmlns:p="http://schemas.microsoft.com/office/2006/metadata/properties" xmlns:xsi="http://www.w3.org/2001/XMLSchema-instance" xmlns:pc="http://schemas.microsoft.com/office/infopath/2007/PartnerControls">
-  <documentManagement/>
-</p:properties>
-</file>
-
 <file path=customXml/itemProps1.xml><?xml version="1.0" encoding="utf-8"?>
 <ds:datastoreItem xmlns:ds="http://schemas.openxmlformats.org/officeDocument/2006/customXml" ds:itemID="{356A7A6B-3949-4E1B-BAB3-FDC63B06C8ED}">
   <ds:schemaRefs>
@@ -12150,6 +12163,23 @@
 </file>
 
 <file path=customXml/itemProps2.xml><?xml version="1.0" encoding="utf-8"?>
+<ds:datastoreItem xmlns:ds="http://schemas.openxmlformats.org/officeDocument/2006/customXml" ds:itemID="{F10E3395-82EA-4C3E-97EF-88C74BF5F12D}">
+  <ds:schemaRefs>
+    <ds:schemaRef ds:uri="http://purl.org/dc/dcmitype/"/>
+    <ds:schemaRef ds:uri="http://schemas.microsoft.com/office/2006/metadata/properties"/>
+    <ds:schemaRef ds:uri="http://schemas.microsoft.com/office/2006/documentManagement/types"/>
+    <ds:schemaRef ds:uri="http://purl.org/dc/terms/"/>
+    <ds:schemaRef ds:uri="http://purl.org/dc/elements/1.1/"/>
+    <ds:schemaRef ds:uri="http://schemas.microsoft.com/office/infopath/2007/PartnerControls"/>
+    <ds:schemaRef ds:uri="d543374b-509c-4350-a5c8-3c1bd8055ec5"/>
+    <ds:schemaRef ds:uri="http://schemas.openxmlformats.org/package/2006/metadata/core-properties"/>
+    <ds:schemaRef ds:uri="c224ffea-49cd-4700-9eee-e6fd160cd816"/>
+    <ds:schemaRef ds:uri="http://www.w3.org/XML/1998/namespace"/>
+  </ds:schemaRefs>
+</ds:datastoreItem>
+</file>
+
+<file path=customXml/itemProps3.xml><?xml version="1.0" encoding="utf-8"?>
 <ds:datastoreItem xmlns:ds="http://schemas.openxmlformats.org/officeDocument/2006/customXml" ds:itemID="{4694CC2E-81AE-412E-A18E-BB25285B17C3}">
   <ds:schemaRefs>
     <ds:schemaRef ds:uri="http://schemas.microsoft.com/office/2006/metadata/contentType"/>
@@ -12166,21 +12196,4 @@
     <ds:schemaRef ds:uri="http://schemas.microsoft.com/internal/obd"/>
   </ds:schemaRefs>
 </ds:datastoreItem>
-</file>
-
-<file path=customXml/itemProps3.xml><?xml version="1.0" encoding="utf-8"?>
-<ds:datastoreItem xmlns:ds="http://schemas.openxmlformats.org/officeDocument/2006/customXml" ds:itemID="{F10E3395-82EA-4C3E-97EF-88C74BF5F12D}">
-  <ds:schemaRefs>
-    <ds:schemaRef ds:uri="http://purl.org/dc/dcmitype/"/>
-    <ds:schemaRef ds:uri="http://schemas.microsoft.com/office/2006/metadata/properties"/>
-    <ds:schemaRef ds:uri="http://schemas.microsoft.com/office/2006/documentManagement/types"/>
-    <ds:schemaRef ds:uri="http://purl.org/dc/terms/"/>
-    <ds:schemaRef ds:uri="http://purl.org/dc/elements/1.1/"/>
-    <ds:schemaRef ds:uri="http://schemas.microsoft.com/office/infopath/2007/PartnerControls"/>
-    <ds:schemaRef ds:uri="d543374b-509c-4350-a5c8-3c1bd8055ec5"/>
-    <ds:schemaRef ds:uri="http://schemas.openxmlformats.org/package/2006/metadata/core-properties"/>
-    <ds:schemaRef ds:uri="c224ffea-49cd-4700-9eee-e6fd160cd816"/>
-    <ds:schemaRef ds:uri="http://www.w3.org/XML/1998/namespace"/>
-  </ds:schemaRefs>
-</ds:datastoreItem>
 </file>